--- a/livrables/P11_FashionInsta_Cadrage_PoC_COMEX_avec_photo.pptx
+++ b/livrables/P11_FashionInsta_Cadrage_PoC_COMEX_avec_photo.pptx
@@ -4008,7 +4008,7 @@
                 <a:ea typeface="Inter Display" pitchFamily="34" charset="-122"/>
                 <a:cs typeface="Inter Display" pitchFamily="34" charset="-120"/>
               </a:rPr>
-              <a:t>30 jours-homme répartis sur six profils</a:t>
+              <a:t>30 jours-homme sur quatre profils Data</a:t>
             </a:r>
             <a:endParaRPr lang="en-US" sz="3000" dirty="0"/>
           </a:p>
@@ -4181,7 +4181,7 @@
                 <a:ea typeface="Inter" pitchFamily="34" charset="-122"/>
                 <a:cs typeface="Inter" pitchFamily="34" charset="-120"/>
               </a:rPr>
-              <a:t>Data Scientist / ML Engineer</a:t>
+              <a:t>Data Scientist (3)</a:t>
             </a:r>
             <a:endParaRPr lang="en-US" sz="1250" dirty="0"/>
           </a:p>
@@ -4280,7 +4280,7 @@
                 <a:ea typeface="Inter" pitchFamily="34" charset="-122"/>
                 <a:cs typeface="Inter" pitchFamily="34" charset="-120"/>
               </a:rPr>
-              <a:t>12 j-h</a:t>
+              <a:t>16 j-h</a:t>
             </a:r>
             <a:endParaRPr lang="en-US" sz="1250" dirty="0"/>
           </a:p>
@@ -4321,7 +4321,7 @@
                 <a:ea typeface="Inter" pitchFamily="34" charset="-122"/>
                 <a:cs typeface="Inter" pitchFamily="34" charset="-120"/>
               </a:rPr>
-              <a:t>Chef de projet IA / Product</a:t>
+              <a:t>Data Engineer (2)</a:t>
             </a:r>
             <a:endParaRPr lang="en-US" sz="1250" dirty="0"/>
           </a:p>
@@ -4365,7 +4365,7 @@
         <p:spPr>
           <a:xfrm>
             <a:off x="4114800" y="2537460"/>
-            <a:ext cx="2556510" cy="201168"/>
+            <a:ext cx="2300859" cy="201168"/>
           </a:xfrm>
           <a:prstGeom prst="roundRect">
             <a:avLst>
@@ -4420,7 +4420,7 @@
                 <a:ea typeface="Inter" pitchFamily="34" charset="-122"/>
                 <a:cs typeface="Inter" pitchFamily="34" charset="-120"/>
               </a:rPr>
-              <a:t>5 j-h</a:t>
+              <a:t>6 j-h</a:t>
             </a:r>
             <a:endParaRPr lang="en-US" sz="1250" dirty="0"/>
           </a:p>
@@ -4461,7 +4461,7 @@
                 <a:ea typeface="Inter" pitchFamily="34" charset="-122"/>
                 <a:cs typeface="Inter" pitchFamily="34" charset="-120"/>
               </a:rPr>
-              <a:t>Data Engineer</a:t>
+              <a:t>Tech Lead Data (1)</a:t>
             </a:r>
             <a:endParaRPr lang="en-US" sz="1250" dirty="0"/>
           </a:p>
@@ -4505,7 +4505,7 @@
         <p:spPr>
           <a:xfrm>
             <a:off x="4114800" y="3058668"/>
-            <a:ext cx="2045208" cy="201168"/>
+            <a:ext cx="1533906" cy="201168"/>
           </a:xfrm>
           <a:prstGeom prst="roundRect">
             <a:avLst>
@@ -4601,7 +4601,7 @@
                 <a:ea typeface="Inter" pitchFamily="34" charset="-122"/>
                 <a:cs typeface="Inter" pitchFamily="34" charset="-120"/>
               </a:rPr>
-              <a:t>Expert métier e-commerce</a:t>
+              <a:t>MLOps Engineer (1)</a:t>
             </a:r>
             <a:endParaRPr lang="en-US" sz="1250" dirty="0"/>
           </a:p>
@@ -4645,7 +4645,7 @@
         <p:spPr>
           <a:xfrm>
             <a:off x="4114800" y="3579876"/>
-            <a:ext cx="2045208" cy="201168"/>
+            <a:ext cx="1533906" cy="201168"/>
           </a:xfrm>
           <a:prstGeom prst="roundRect">
             <a:avLst>
@@ -4741,7 +4741,7 @@
                 <a:ea typeface="Inter" pitchFamily="34" charset="-122"/>
                 <a:cs typeface="Inter" pitchFamily="34" charset="-120"/>
               </a:rPr>
-              <a:t>Ingénieur Azure / Cloud</a:t>
+              <a:t>Alicia / évaluateurs métier</a:t>
             </a:r>
             <a:endParaRPr lang="en-US" sz="1250" dirty="0"/>
           </a:p>
@@ -4792,9 +4792,7 @@
               <a:gd name="adj" fmla="val 31818"/>
             </a:avLst>
           </a:prstGeom>
-          <a:solidFill>
-            <a:srgbClr val="82AE99"/>
-          </a:solidFill>
+          <a:noFill/>
           <a:ln w="12700">
             <a:solidFill>
               <a:srgbClr val="82AE99">
@@ -4813,8 +4811,8 @@
         </p:nvSpPr>
         <p:spPr>
           <a:xfrm>
-            <a:off x="10433304" y="4069080"/>
-            <a:ext cx="1088136" cy="237744"/>
+            <a:off x="9674352" y="4069080"/>
+            <a:ext cx="1828800" cy="237744"/>
           </a:xfrm>
           <a:prstGeom prst="rect">
             <a:avLst/>
@@ -4840,7 +4838,7 @@
                 <a:ea typeface="Inter" pitchFamily="34" charset="-122"/>
                 <a:cs typeface="Inter" pitchFamily="34" charset="-120"/>
               </a:rPr>
-              <a:t>3 j-h</a:t>
+              <a:t>consultés</a:t>
             </a:r>
             <a:endParaRPr lang="en-US" sz="1250" dirty="0"/>
           </a:p>
@@ -4881,7 +4879,7 @@
                 <a:ea typeface="Inter" pitchFamily="34" charset="-122"/>
                 <a:cs typeface="Inter" pitchFamily="34" charset="-120"/>
               </a:rPr>
-              <a:t>Référent RGPD / sécurité</a:t>
+              <a:t>DPO / sécurité / produit</a:t>
             </a:r>
             <a:endParaRPr lang="en-US" sz="1250" dirty="0"/>
           </a:p>
@@ -4932,9 +4930,7 @@
               <a:gd name="adj" fmla="val 31818"/>
             </a:avLst>
           </a:prstGeom>
-          <a:solidFill>
-            <a:srgbClr val="82AE99"/>
-          </a:solidFill>
+          <a:noFill/>
           <a:ln w="12700">
             <a:solidFill>
               <a:srgbClr val="82AE99">
@@ -4953,8 +4949,8 @@
         </p:nvSpPr>
         <p:spPr>
           <a:xfrm>
-            <a:off x="10433304" y="4590288"/>
-            <a:ext cx="1088136" cy="237744"/>
+            <a:off x="9674352" y="4590288"/>
+            <a:ext cx="1828800" cy="237744"/>
           </a:xfrm>
           <a:prstGeom prst="rect">
             <a:avLst/>
@@ -4980,7 +4976,7 @@
                 <a:ea typeface="Inter" pitchFamily="34" charset="-122"/>
                 <a:cs typeface="Inter" pitchFamily="34" charset="-120"/>
               </a:rPr>
-              <a:t>2 j-h</a:t>
+              <a:t>consultés</a:t>
             </a:r>
             <a:endParaRPr lang="en-US" sz="1250" dirty="0"/>
           </a:p>
@@ -5050,7 +5046,7 @@
                 <a:ea typeface="Inter" pitchFamily="34" charset="-122"/>
                 <a:cs typeface="Inter" pitchFamily="34" charset="-120"/>
               </a:rPr>
-              <a:t>Alicia : sponsor &amp; arbitrages</a:t>
+              <a:t>Alicia : sponsor · métiers &amp; DPO consultés</a:t>
             </a:r>
             <a:endParaRPr lang="en-US" sz="1300" dirty="0"/>
           </a:p>
@@ -5091,7 +5087,7 @@
                 <a:ea typeface="Inter" pitchFamily="34" charset="-122"/>
                 <a:cs typeface="Inter" pitchFamily="34" charset="-120"/>
               </a:rPr>
-              <a:t>Budget € = coûts journaliers × charges + consommation Azure (à chiffrer)</a:t>
+              <a:t>Data : 10 860 €  ·  Azure PoC : 400 € (hypothèse)</a:t>
             </a:r>
             <a:endParaRPr lang="en-US" sz="1140" dirty="0"/>
           </a:p>
@@ -9601,6 +9597,42 @@
               <a:t>Ce sont des prévisions commerciales, pas des résultats que le PoC prétend démontrer.</a:t>
             </a:r>
             <a:endParaRPr lang="en-US" sz="1300" dirty="0"/>
+          </a:p>
+        </p:txBody>
+      </p:sp>
+      <p:sp>
+        <p:nvSpPr>
+          <p:cNvPr id="23" name="TextBox 22"/>
+          <p:cNvSpPr txBox="1"/>
+          <p:nvPr/>
+        </p:nvSpPr>
+        <p:spPr>
+          <a:xfrm>
+            <a:off x="914400" y="5129784"/>
+            <a:ext cx="10698480" cy="182880"/>
+          </a:xfrm>
+          <a:prstGeom prst="rect">
+            <a:avLst/>
+          </a:prstGeom>
+          <a:noFill/>
+        </p:spPr>
+        <p:txBody>
+          <a:bodyPr wrap="square" lIns="18288" rIns="18288" tIns="9144" bIns="0">
+            <a:spAutoFit/>
+          </a:bodyPr>
+          <a:lstStyle/>
+          <a:p>
+            <a:pPr>
+              <a:defRPr sz="1120" b="1">
+                <a:solidFill>
+                  <a:srgbClr val="17221F"/>
+                </a:solidFill>
+                <a:latin typeface="Inter"/>
+              </a:defRPr>
+            </a:pPr>
+            <a:r>
+              <a:t>11 magasins   ·   950 000 visiteurs web uniques/an   ·   875 références / 9 catégories</a:t>
+            </a:r>
           </a:p>
         </p:txBody>
       </p:sp>
